--- a/lecture_pptx/out/s11/ワーク02_講師用.pptx
+++ b/lecture_pptx/out/s11/ワーク02_講師用.pptx
@@ -1106,7 +1106,7 @@
                 <a:ea typeface="Yu Gothic UI Semibold" pitchFamily="34" charset="-122"/>
                 <a:cs typeface="Yu Gothic UI Semibold" pitchFamily="34" charset="-120"/>
               </a:rPr>
-              <a:t>シナリオ本文量産 + 配信ログ分析</a:t>
+              <a:t>AI 応答チャットボット化 (Gemini 連携)</a:t>
             </a:r>
             <a:endParaRPr lang="en-US" sz="3800" dirty="0"/>
           </a:p>
@@ -1145,7 +1145,7 @@
                 <a:ea typeface="Yu Gothic UI" pitchFamily="34" charset="-122"/>
                 <a:cs typeface="Yu Gothic UI" pitchFamily="34" charset="-120"/>
               </a:rPr>
-              <a:t>AIで本文を一気に揃え、配信後はログから次の改善を引き出す</a:t>
+              <a:t>キーワード応答から自然対話へ、AI で「話せる」チャットボットに進化させる</a:t>
             </a:r>
             <a:endParaRPr lang="en-US" sz="1900" dirty="0"/>
           </a:p>
@@ -1275,7 +1275,7 @@
                 <a:ea typeface="Yu Gothic UI Semibold" pitchFamily="34" charset="-122"/>
                 <a:cs typeface="Yu Gothic UI Semibold" pitchFamily="34" charset="-120"/>
               </a:rPr>
-              <a:t>演習1 シナリオ本文を AI で量産 — 解答・指導ポイント</a:t>
+              <a:t>演習1 Gemini API を組み込んで AI 応答化 — 解答・指導ポイント</a:t>
             </a:r>
             <a:endParaRPr lang="en-US" sz="2600" dirty="0"/>
           </a:p>
@@ -1462,7 +1462,7 @@
                 <a:ea typeface="Yu Gothic UI" pitchFamily="34" charset="-122"/>
                 <a:cs typeface="Yu Gothic UI" pitchFamily="34" charset="-120"/>
               </a:rPr>
-              <a:t>上のシナリオに沿って15通(3層×5日)の配信本文を作って。</a:t>
+              <a:t>上のチャットボットGAS に、Gemini API を組み込む改良をしてください。</a:t>
             </a:r>
             <a:endParaRPr lang="en-US" sz="1400" dirty="0"/>
           </a:p>
@@ -1482,7 +1482,7 @@
                 <a:ea typeface="Yu Gothic UI" pitchFamily="34" charset="-122"/>
                 <a:cs typeface="Yu Gothic UI" pitchFamily="34" charset="-120"/>
               </a:rPr>
-              <a:t>・各300文字以内、絵文字+改行多め</a:t>
+              <a:t>・API キーはスクリプトプロパティ GEMINI_API_KEY から取得</a:t>
             </a:r>
             <a:endParaRPr lang="en-US" sz="1400" dirty="0"/>
           </a:p>
@@ -1502,7 +1502,7 @@
                 <a:ea typeface="Yu Gothic UI" pitchFamily="34" charset="-122"/>
                 <a:cs typeface="Yu Gothic UI" pitchFamily="34" charset="-120"/>
               </a:rPr>
-              <a:t>・層別のトーン: 高=直球/中=柔らかく/低=教育中心</a:t>
+              <a:t>・キーワードに当てはまらない質問を Gemini に投げる</a:t>
             </a:r>
             <a:endParaRPr lang="en-US" sz="1400" dirty="0"/>
           </a:p>
@@ -1522,7 +1522,27 @@
                 <a:ea typeface="Yu Gothic UI" pitchFamily="34" charset="-122"/>
                 <a:cs typeface="Yu Gothic UI" pitchFamily="34" charset="-120"/>
               </a:rPr>
-              <a:t>・3軸: ●●●</a:t>
+              <a:t>・システムプロンプト: 「あなたは保険営業一次受けAIです。丁寧語で、200文字以内で返答してください。詳細は担当者に繋ぐ旨を伝えてください。」</a:t>
+            </a:r>
+            <a:endParaRPr lang="en-US" sz="1400" dirty="0"/>
+          </a:p>
+          <a:p>
+            <a:pPr indent="0" marL="0">
+              <a:spcAft>
+                <a:spcPts val="400"/>
+              </a:spcAft>
+              <a:buNone/>
+            </a:pPr>
+            <a:r>
+              <a:rPr lang="en-US" sz="1400" dirty="0">
+                <a:solidFill>
+                  <a:srgbClr val="1A1A1A"/>
+                </a:solidFill>
+                <a:latin typeface="Yu Gothic UI" pitchFamily="34" charset="0"/>
+                <a:ea typeface="Yu Gothic UI" pitchFamily="34" charset="-122"/>
+                <a:cs typeface="Yu Gothic UI" pitchFamily="34" charset="-120"/>
+              </a:rPr>
+              <a:t>・API失敗時は「少々お待ちください、担当者から連絡します」を返信</a:t>
             </a:r>
             <a:endParaRPr lang="en-US" sz="1400" dirty="0"/>
           </a:p>
@@ -1650,7 +1670,27 @@
                 <a:ea typeface="Yu Gothic UI" pitchFamily="34" charset="-122"/>
                 <a:cs typeface="Yu Gothic UI" pitchFamily="34" charset="-120"/>
               </a:rPr>
-              <a:t>・15通の本文 (スプシのマトリクスに収まる形式)</a:t>
+              <a:t>・改良版 GAS(doPost + Gemini 呼び出し + フォールバック)</a:t>
+            </a:r>
+            <a:endParaRPr lang="en-US" sz="1400" dirty="0"/>
+          </a:p>
+          <a:p>
+            <a:pPr indent="0" marL="0">
+              <a:spcAft>
+                <a:spcPts val="400"/>
+              </a:spcAft>
+              <a:buNone/>
+            </a:pPr>
+            <a:r>
+              <a:rPr lang="en-US" sz="1400" dirty="0">
+                <a:solidFill>
+                  <a:srgbClr val="1A1A1A"/>
+                </a:solidFill>
+                <a:latin typeface="Yu Gothic UI" pitchFamily="34" charset="0"/>
+                <a:ea typeface="Yu Gothic UI" pitchFamily="34" charset="-122"/>
+                <a:cs typeface="Yu Gothic UI" pitchFamily="34" charset="-120"/>
+              </a:rPr>
+              <a:t>・実機で自由入力→自然応答が返ることを確認</a:t>
             </a:r>
             <a:endParaRPr lang="en-US" sz="1400" dirty="0"/>
           </a:p>
@@ -1778,7 +1818,7 @@
                 <a:ea typeface="Yu Gothic UI" pitchFamily="34" charset="-122"/>
                 <a:cs typeface="Yu Gothic UI" pitchFamily="34" charset="-120"/>
               </a:rPr>
-              <a:t>・出力された本文がメルマガ調になりがち。LINE のトーク画面を意識して再生成。</a:t>
+              <a:t>・「モデル名」を最新のものに(2026年時点は gemini-3.5-flash 等)。無効モデルだと沈黙。</a:t>
             </a:r>
             <a:endParaRPr lang="en-US" sz="1400" dirty="0"/>
           </a:p>
@@ -1798,7 +1838,7 @@
                 <a:ea typeface="Yu Gothic UI" pitchFamily="34" charset="-122"/>
                 <a:cs typeface="Yu Gothic UI" pitchFamily="34" charset="-120"/>
               </a:rPr>
-              <a:t>・全部 AI 任せだと個性が出ない。1〜2通は自分の言葉で書き直させる。</a:t>
+              <a:t>・システムプロンプトを甘くしない。「不明なら不明」「担当者に繋ぐ」を必ず明記。</a:t>
             </a:r>
             <a:endParaRPr lang="en-US" sz="1400" dirty="0"/>
           </a:p>
@@ -1818,7 +1858,7 @@
                 <a:ea typeface="Yu Gothic UI" pitchFamily="34" charset="-122"/>
                 <a:cs typeface="Yu Gothic UI" pitchFamily="34" charset="-120"/>
               </a:rPr>
-              <a:t>・配信時間は層別に変える(高=朝/中=昼/低=夜)等の応用も伝える。</a:t>
+              <a:t>・LINEの返信タイムアウトは30秒。Gemini応答が遅いと切れる。応答が長すぎると LINE 側でエラー。</a:t>
             </a:r>
             <a:endParaRPr lang="en-US" sz="1400" dirty="0"/>
           </a:p>
@@ -1909,7 +1949,7 @@
                 <a:ea typeface="Yu Gothic UI Semibold" pitchFamily="34" charset="-122"/>
                 <a:cs typeface="Yu Gothic UI Semibold" pitchFamily="34" charset="-120"/>
               </a:rPr>
-              <a:t>演習2 配信ログをAIで分析+週次PDCA — 解答・指導ポイント</a:t>
+              <a:t>演習2 FAQ知識 + ハンドオフ設計 — 解答・指導ポイント</a:t>
             </a:r>
             <a:endParaRPr lang="en-US" sz="2600" dirty="0"/>
           </a:p>
@@ -2096,7 +2136,7 @@
                 <a:ea typeface="Yu Gothic UI" pitchFamily="34" charset="-122"/>
                 <a:cs typeface="Yu Gothic UI" pitchFamily="34" charset="-120"/>
               </a:rPr>
-              <a:t>以下は私の公式LINE 配信ログ(過去90日)です。</a:t>
+              <a:t>上のチャットボットに、FAQ知識とハンドオフを追加してください。</a:t>
             </a:r>
             <a:endParaRPr lang="en-US" sz="1400" dirty="0"/>
           </a:p>
@@ -2116,7 +2156,7 @@
                 <a:ea typeface="Yu Gothic UI" pitchFamily="34" charset="-122"/>
                 <a:cs typeface="Yu Gothic UI" pitchFamily="34" charset="-120"/>
               </a:rPr>
-              <a:t>目的は「来週試す改善1点を決める」こと。次の観点で分析してください。</a:t>
+              <a:t>・FAQ(15〜20項目)をシステムプロンプトに埋め込み、または Gem を作って知識登録</a:t>
             </a:r>
             <a:endParaRPr lang="en-US" sz="1400" dirty="0"/>
           </a:p>
@@ -2136,7 +2176,7 @@
                 <a:ea typeface="Yu Gothic UI" pitchFamily="34" charset="-122"/>
                 <a:cs typeface="Yu Gothic UI" pitchFamily="34" charset="-120"/>
               </a:rPr>
-              <a:t>  - 反応が良かった投稿の共通点 5つ</a:t>
+              <a:t>・AI が対応困難と判断したら応答冒頭に [HANDOFF] を返す</a:t>
             </a:r>
             <a:endParaRPr lang="en-US" sz="1400" dirty="0"/>
           </a:p>
@@ -2156,7 +2196,7 @@
                 <a:ea typeface="Yu Gothic UI" pitchFamily="34" charset="-122"/>
                 <a:cs typeface="Yu Gothic UI" pitchFamily="34" charset="-120"/>
               </a:rPr>
-              <a:t>  - 外した投稿の共通点 3つ</a:t>
+              <a:t>・[HANDOFF] を検知したら「担当者に繋ぎます、後ほどご連絡します」を返信+相談員(●●●@example.com)にメール通知</a:t>
             </a:r>
             <a:endParaRPr lang="en-US" sz="1400" dirty="0"/>
           </a:p>
@@ -2176,27 +2216,7 @@
                 <a:ea typeface="Yu Gothic UI" pitchFamily="34" charset="-122"/>
                 <a:cs typeface="Yu Gothic UI" pitchFamily="34" charset="-120"/>
               </a:rPr>
-              <a:t>  - 改善案を 高/中/低 で5つ</a:t>
-            </a:r>
-            <a:endParaRPr lang="en-US" sz="1400" dirty="0"/>
-          </a:p>
-          <a:p>
-            <a:pPr indent="0" marL="0">
-              <a:spcAft>
-                <a:spcPts val="400"/>
-              </a:spcAft>
-              <a:buNone/>
-            </a:pPr>
-            <a:r>
-              <a:rPr lang="en-US" sz="1400" dirty="0">
-                <a:solidFill>
-                  <a:srgbClr val="1A1A1A"/>
-                </a:solidFill>
-                <a:latin typeface="Yu Gothic UI" pitchFamily="34" charset="0"/>
-                <a:ea typeface="Yu Gothic UI" pitchFamily="34" charset="-122"/>
-                <a:cs typeface="Yu Gothic UI" pitchFamily="34" charset="-120"/>
-              </a:rPr>
-              <a:t>【データ】(CSV を貼る)</a:t>
+              <a:t>・メール本文に会話履歴+LINEユーザーIDを含める</a:t>
             </a:r>
             <a:endParaRPr lang="en-US" sz="1400" dirty="0"/>
           </a:p>
@@ -2324,7 +2344,7 @@
                 <a:ea typeface="Yu Gothic UI" pitchFamily="34" charset="-122"/>
                 <a:cs typeface="Yu Gothic UI" pitchFamily="34" charset="-120"/>
               </a:rPr>
-              <a:t>・分析レポート(共通点+改善案)</a:t>
+              <a:t>・FAQ知識付き GAS</a:t>
             </a:r>
             <a:endParaRPr lang="en-US" sz="1400" dirty="0"/>
           </a:p>
@@ -2344,7 +2364,27 @@
                 <a:ea typeface="Yu Gothic UI" pitchFamily="34" charset="-122"/>
                 <a:cs typeface="Yu Gothic UI" pitchFamily="34" charset="-120"/>
               </a:rPr>
-              <a:t>・今週試す1点(具体的アクション)</a:t>
+              <a:t>・[HANDOFF] 検知 → 相談員メール通知</a:t>
+            </a:r>
+            <a:endParaRPr lang="en-US" sz="1400" dirty="0"/>
+          </a:p>
+          <a:p>
+            <a:pPr indent="0" marL="0">
+              <a:spcAft>
+                <a:spcPts val="400"/>
+              </a:spcAft>
+              <a:buNone/>
+            </a:pPr>
+            <a:r>
+              <a:rPr lang="en-US" sz="1400" dirty="0">
+                <a:solidFill>
+                  <a:srgbClr val="1A1A1A"/>
+                </a:solidFill>
+                <a:latin typeface="Yu Gothic UI" pitchFamily="34" charset="0"/>
+                <a:ea typeface="Yu Gothic UI" pitchFamily="34" charset="-122"/>
+                <a:cs typeface="Yu Gothic UI" pitchFamily="34" charset="-120"/>
+              </a:rPr>
+              <a:t>・3パターン(既知/未知/不適切)テストで挙動確認</a:t>
             </a:r>
             <a:endParaRPr lang="en-US" sz="1400" dirty="0"/>
           </a:p>
@@ -2472,7 +2512,7 @@
                 <a:ea typeface="Yu Gothic UI" pitchFamily="34" charset="-122"/>
                 <a:cs typeface="Yu Gothic UI" pitchFamily="34" charset="-120"/>
               </a:rPr>
-              <a:t>・データ整形を手抜きしがち。「日/タイトル/数値」3要素必須を強調。</a:t>
+              <a:t>・FAQ が古いままだと精度が下がる。「四半期に1回更新」の運用を必ず伝える。</a:t>
             </a:r>
             <a:endParaRPr lang="en-US" sz="1400" dirty="0"/>
           </a:p>
@@ -2492,7 +2532,7 @@
                 <a:ea typeface="Yu Gothic UI" pitchFamily="34" charset="-122"/>
                 <a:cs typeface="Yu Gothic UI" pitchFamily="34" charset="-120"/>
               </a:rPr>
-              <a:t>・「全部やる」になりやすい。1点に絞る制約を AI に伝える。</a:t>
+              <a:t>・[HANDOFF] を「AI が判断する」ことに慣れさせる。明示的なマーカーで扱いやすくなる。</a:t>
             </a:r>
             <a:endParaRPr lang="en-US" sz="1400" dirty="0"/>
           </a:p>
@@ -2512,7 +2552,27 @@
                 <a:ea typeface="Yu Gothic UI" pitchFamily="34" charset="-122"/>
                 <a:cs typeface="Yu Gothic UI" pitchFamily="34" charset="-120"/>
               </a:rPr>
-              <a:t>・改善案がフワッとしないよう、「変更前/変更後」をセットで出力させる。</a:t>
+              <a:t>・相談員メールが埋もれないよう件名を [LINE相談] で始めるなどのルール化。</a:t>
+            </a:r>
+            <a:endParaRPr lang="en-US" sz="1400" dirty="0"/>
+          </a:p>
+          <a:p>
+            <a:pPr indent="0" marL="0">
+              <a:spcAft>
+                <a:spcPts val="400"/>
+              </a:spcAft>
+              <a:buNone/>
+            </a:pPr>
+            <a:r>
+              <a:rPr lang="en-US" sz="1400" dirty="0">
+                <a:solidFill>
+                  <a:srgbClr val="1A1A1A"/>
+                </a:solidFill>
+                <a:latin typeface="Yu Gothic UI" pitchFamily="34" charset="0"/>
+                <a:ea typeface="Yu Gothic UI" pitchFamily="34" charset="-122"/>
+                <a:cs typeface="Yu Gothic UI" pitchFamily="34" charset="-120"/>
+              </a:rPr>
+              <a:t>・「不適切質問(炎上リスク)」のテストを必ず1件入れる。AIが暴走しないか確認。</a:t>
             </a:r>
             <a:endParaRPr lang="en-US" sz="1400" dirty="0"/>
           </a:p>

--- a/lecture_pptx/out/s11/ワーク02_講師用.pptx
+++ b/lecture_pptx/out/s11/ワーク02_講師用.pptx
@@ -1106,7 +1106,7 @@
                 <a:ea typeface="Yu Gothic UI Semibold" pitchFamily="34" charset="-122"/>
                 <a:cs typeface="Yu Gothic UI Semibold" pitchFamily="34" charset="-120"/>
               </a:rPr>
-              <a:t>AI 応答チャットボット化 (Gemini 連携)</a:t>
+              <a:t>FAQ チャットボットを GAS で作って公開</a:t>
             </a:r>
             <a:endParaRPr lang="en-US" sz="3800" dirty="0"/>
           </a:p>
@@ -1145,7 +1145,7 @@
                 <a:ea typeface="Yu Gothic UI" pitchFamily="34" charset="-122"/>
                 <a:cs typeface="Yu Gothic UI" pitchFamily="34" charset="-120"/>
               </a:rPr>
-              <a:t>キーワード応答から自然対話へ、AI で「話せる」チャットボットに進化させる</a:t>
+              <a:t>ナレッジを集め → Gemini で GAS Web アプリを生成 → デプロイしてリッチメニューに載せる</a:t>
             </a:r>
             <a:endParaRPr lang="en-US" sz="1900" dirty="0"/>
           </a:p>
@@ -1275,7 +1275,7 @@
                 <a:ea typeface="Yu Gothic UI Semibold" pitchFamily="34" charset="-122"/>
                 <a:cs typeface="Yu Gothic UI Semibold" pitchFamily="34" charset="-120"/>
               </a:rPr>
-              <a:t>演習1 Gemini API を組み込んで AI 応答化 — 解答・指導ポイント</a:t>
+              <a:t>演習1 FAQ 設計 + Gemini で GAS Web アプリをバイブコーディング — 解答・指導ポイント</a:t>
             </a:r>
             <a:endParaRPr lang="en-US" sz="2600" dirty="0"/>
           </a:p>
@@ -1462,7 +1462,7 @@
                 <a:ea typeface="Yu Gothic UI" pitchFamily="34" charset="-122"/>
                 <a:cs typeface="Yu Gothic UI" pitchFamily="34" charset="-120"/>
               </a:rPr>
-              <a:t>上のチャットボットGAS に、Gemini API を組み込む改良をしてください。</a:t>
+              <a:t>次の FAQ を使って、Google Apps Script のシンプルなチャット Web アプリを書いてください。</a:t>
             </a:r>
             <a:endParaRPr lang="en-US" sz="1400" dirty="0"/>
           </a:p>
@@ -1482,7 +1482,7 @@
                 <a:ea typeface="Yu Gothic UI" pitchFamily="34" charset="-122"/>
                 <a:cs typeface="Yu Gothic UI" pitchFamily="34" charset="-120"/>
               </a:rPr>
-              <a:t>・API キーはスクリプトプロパティ GEMINI_API_KEY から取得</a:t>
+              <a:t>・doGet で HTML を返す(タイトル/背景色は 3軸に合わせて指定)</a:t>
             </a:r>
             <a:endParaRPr lang="en-US" sz="1400" dirty="0"/>
           </a:p>
@@ -1502,7 +1502,7 @@
                 <a:ea typeface="Yu Gothic UI" pitchFamily="34" charset="-122"/>
                 <a:cs typeface="Yu Gothic UI" pitchFamily="34" charset="-120"/>
               </a:rPr>
-              <a:t>・キーワードに当てはまらない質問を Gemini に投げる</a:t>
+              <a:t>・doPost または google.script.run で質問を受け、以下 FAQ に一致すれば回答を返す</a:t>
             </a:r>
             <a:endParaRPr lang="en-US" sz="1400" dirty="0"/>
           </a:p>
@@ -1522,7 +1522,7 @@
                 <a:ea typeface="Yu Gothic UI" pitchFamily="34" charset="-122"/>
                 <a:cs typeface="Yu Gothic UI" pitchFamily="34" charset="-120"/>
               </a:rPr>
-              <a:t>・システムプロンプト: 「あなたは保険営業一次受けAIです。丁寧語で、200文字以内で返答してください。詳細は担当者に繋ぐ旨を伝えてください。」</a:t>
+              <a:t>・一致しない場合は「担当者に繋ぎます、後ほどご連絡します」を返す</a:t>
             </a:r>
             <a:endParaRPr lang="en-US" sz="1400" dirty="0"/>
           </a:p>
@@ -1542,7 +1542,87 @@
                 <a:ea typeface="Yu Gothic UI" pitchFamily="34" charset="-122"/>
                 <a:cs typeface="Yu Gothic UI" pitchFamily="34" charset="-120"/>
               </a:rPr>
-              <a:t>・API失敗時は「少々お待ちください、担当者から連絡します」を返信</a:t>
+              <a:t>・FAQ データ:</a:t>
+            </a:r>
+            <a:endParaRPr lang="en-US" sz="1400" dirty="0"/>
+          </a:p>
+          <a:p>
+            <a:pPr indent="0" marL="0">
+              <a:spcAft>
+                <a:spcPts val="400"/>
+              </a:spcAft>
+              <a:buNone/>
+            </a:pPr>
+            <a:r>
+              <a:rPr lang="en-US" sz="1400" dirty="0">
+                <a:solidFill>
+                  <a:srgbClr val="1A1A1A"/>
+                </a:solidFill>
+                <a:latin typeface="Yu Gothic UI" pitchFamily="34" charset="0"/>
+                <a:ea typeface="Yu Gothic UI" pitchFamily="34" charset="-122"/>
+                <a:cs typeface="Yu Gothic UI" pitchFamily="34" charset="-120"/>
+              </a:rPr>
+              <a:t>  Q: 保険の解約はどうすれば? A: マイページから解約手続きが可能です。</a:t>
+            </a:r>
+            <a:endParaRPr lang="en-US" sz="1400" dirty="0"/>
+          </a:p>
+          <a:p>
+            <a:pPr indent="0" marL="0">
+              <a:spcAft>
+                <a:spcPts val="400"/>
+              </a:spcAft>
+              <a:buNone/>
+            </a:pPr>
+            <a:r>
+              <a:rPr lang="en-US" sz="1400" dirty="0">
+                <a:solidFill>
+                  <a:srgbClr val="1A1A1A"/>
+                </a:solidFill>
+                <a:latin typeface="Yu Gothic UI" pitchFamily="34" charset="0"/>
+                <a:ea typeface="Yu Gothic UI" pitchFamily="34" charset="-122"/>
+                <a:cs typeface="Yu Gothic UI" pitchFamily="34" charset="-120"/>
+              </a:rPr>
+              <a:t>  Q: 医療保険の保障範囲は? A: 入院1日目から手術費用まで対象です。</a:t>
+            </a:r>
+            <a:endParaRPr lang="en-US" sz="1400" dirty="0"/>
+          </a:p>
+          <a:p>
+            <a:pPr indent="0" marL="0">
+              <a:spcAft>
+                <a:spcPts val="400"/>
+              </a:spcAft>
+              <a:buNone/>
+            </a:pPr>
+            <a:r>
+              <a:rPr lang="en-US" sz="1400" dirty="0">
+                <a:solidFill>
+                  <a:srgbClr val="1A1A1A"/>
+                </a:solidFill>
+                <a:latin typeface="Yu Gothic UI" pitchFamily="34" charset="0"/>
+                <a:ea typeface="Yu Gothic UI" pitchFamily="34" charset="-122"/>
+                <a:cs typeface="Yu Gothic UI" pitchFamily="34" charset="-120"/>
+              </a:rPr>
+              <a:t>  Q: 保険料の変更はできますか? A: 契約1年後から変更手続きが可能です。</a:t>
+            </a:r>
+            <a:endParaRPr lang="en-US" sz="1400" dirty="0"/>
+          </a:p>
+          <a:p>
+            <a:pPr indent="0" marL="0">
+              <a:spcAft>
+                <a:spcPts val="400"/>
+              </a:spcAft>
+              <a:buNone/>
+            </a:pPr>
+            <a:r>
+              <a:rPr lang="en-US" sz="1400" dirty="0">
+                <a:solidFill>
+                  <a:srgbClr val="1A1A1A"/>
+                </a:solidFill>
+                <a:latin typeface="Yu Gothic UI" pitchFamily="34" charset="0"/>
+                <a:ea typeface="Yu Gothic UI" pitchFamily="34" charset="-122"/>
+                <a:cs typeface="Yu Gothic UI" pitchFamily="34" charset="-120"/>
+              </a:rPr>
+              <a:t>  … (残り 7 件は現場に合わせて)</a:t>
             </a:r>
             <a:endParaRPr lang="en-US" sz="1400" dirty="0"/>
           </a:p>
@@ -1670,7 +1750,7 @@
                 <a:ea typeface="Yu Gothic UI" pitchFamily="34" charset="-122"/>
                 <a:cs typeface="Yu Gothic UI" pitchFamily="34" charset="-120"/>
               </a:rPr>
-              <a:t>・改良版 GAS(doPost + Gemini 呼び出し + フォールバック)</a:t>
+              <a:t>・GAS Web アプリのコード(doGet で HTML 返却、質問応答ロジック含む)</a:t>
             </a:r>
             <a:endParaRPr lang="en-US" sz="1400" dirty="0"/>
           </a:p>
@@ -1690,7 +1770,27 @@
                 <a:ea typeface="Yu Gothic UI" pitchFamily="34" charset="-122"/>
                 <a:cs typeface="Yu Gothic UI" pitchFamily="34" charset="-120"/>
               </a:rPr>
-              <a:t>・実機で自由入力→自然応答が返ることを確認</a:t>
+              <a:t>・スプシに整理された FAQ 10件</a:t>
+            </a:r>
+            <a:endParaRPr lang="en-US" sz="1400" dirty="0"/>
+          </a:p>
+          <a:p>
+            <a:pPr indent="0" marL="0">
+              <a:spcAft>
+                <a:spcPts val="400"/>
+              </a:spcAft>
+              <a:buNone/>
+            </a:pPr>
+            <a:r>
+              <a:rPr lang="en-US" sz="1400" dirty="0">
+                <a:solidFill>
+                  <a:srgbClr val="1A1A1A"/>
+                </a:solidFill>
+                <a:latin typeface="Yu Gothic UI" pitchFamily="34" charset="0"/>
+                <a:ea typeface="Yu Gothic UI" pitchFamily="34" charset="-122"/>
+                <a:cs typeface="Yu Gothic UI" pitchFamily="34" charset="-120"/>
+              </a:rPr>
+              <a:t>・GAS エディタでテスト実行 → 質問に回答が返ることを確認</a:t>
             </a:r>
             <a:endParaRPr lang="en-US" sz="1400" dirty="0"/>
           </a:p>
@@ -1818,7 +1918,7 @@
                 <a:ea typeface="Yu Gothic UI" pitchFamily="34" charset="-122"/>
                 <a:cs typeface="Yu Gothic UI" pitchFamily="34" charset="-120"/>
               </a:rPr>
-              <a:t>・「モデル名」を最新のものに(2026年時点は gemini-3.5-flash 等)。無効モデルだと沈黙。</a:t>
+              <a:t>・FAQ の粒度が粗いと精度低下。「1問1答」を徹底。</a:t>
             </a:r>
             <a:endParaRPr lang="en-US" sz="1400" dirty="0"/>
           </a:p>
@@ -1838,7 +1938,7 @@
                 <a:ea typeface="Yu Gothic UI" pitchFamily="34" charset="-122"/>
                 <a:cs typeface="Yu Gothic UI" pitchFamily="34" charset="-120"/>
               </a:rPr>
-              <a:t>・システムプロンプトを甘くしない。「不明なら不明」「担当者に繋ぐ」を必ず明記。</a:t>
+              <a:t>・生成コードを丸ごと貼る「バイブコーディング」を体験させる。自分で書かせない。</a:t>
             </a:r>
             <a:endParaRPr lang="en-US" sz="1400" dirty="0"/>
           </a:p>
@@ -1858,7 +1958,7 @@
                 <a:ea typeface="Yu Gothic UI" pitchFamily="34" charset="-122"/>
                 <a:cs typeface="Yu Gothic UI" pitchFamily="34" charset="-120"/>
               </a:rPr>
-              <a:t>・LINEの返信タイムアウトは30秒。Gemini応答が遅いと切れる。応答が長すぎると LINE 側でエラー。</a:t>
+              <a:t>・見た目(HTML の色/フォント)を自分の3軸に合わせる指導を。既定の白背景は味気ない。</a:t>
             </a:r>
             <a:endParaRPr lang="en-US" sz="1400" dirty="0"/>
           </a:p>
@@ -1949,7 +2049,7 @@
                 <a:ea typeface="Yu Gothic UI Semibold" pitchFamily="34" charset="-122"/>
                 <a:cs typeface="Yu Gothic UI Semibold" pitchFamily="34" charset="-120"/>
               </a:rPr>
-              <a:t>演習2 FAQ知識 + ハンドオフ設計 — 解答・指導ポイント</a:t>
+              <a:t>演習2 デプロイ + リッチメニューに紐付け + 担当者通知 — 解答・指導ポイント</a:t>
             </a:r>
             <a:endParaRPr lang="en-US" sz="2600" dirty="0"/>
           </a:p>
@@ -2136,7 +2236,7 @@
                 <a:ea typeface="Yu Gothic UI" pitchFamily="34" charset="-122"/>
                 <a:cs typeface="Yu Gothic UI" pitchFamily="34" charset="-120"/>
               </a:rPr>
-              <a:t>上のチャットボットに、FAQ知識とハンドオフを追加してください。</a:t>
+              <a:t>上の GAS Web アプリに、デプロイと担当者通知の機能を追加してください。</a:t>
             </a:r>
             <a:endParaRPr lang="en-US" sz="1400" dirty="0"/>
           </a:p>
@@ -2156,7 +2256,7 @@
                 <a:ea typeface="Yu Gothic UI" pitchFamily="34" charset="-122"/>
                 <a:cs typeface="Yu Gothic UI" pitchFamily="34" charset="-120"/>
               </a:rPr>
-              <a:t>・FAQ(15〜20項目)をシステムプロンプトに埋め込み、または Gem を作って知識登録</a:t>
+              <a:t>・デプロイ手順: [デプロイ &gt; 新しいデプロイ &gt; 種類 = ウェブアプリ、アクセス権 = 全員] を選択、URL を発行</a:t>
             </a:r>
             <a:endParaRPr lang="en-US" sz="1400" dirty="0"/>
           </a:p>
@@ -2176,7 +2276,7 @@
                 <a:ea typeface="Yu Gothic UI" pitchFamily="34" charset="-122"/>
                 <a:cs typeface="Yu Gothic UI" pitchFamily="34" charset="-120"/>
               </a:rPr>
-              <a:t>・AI が対応困難と判断したら応答冒頭に [HANDOFF] を返す</a:t>
+              <a:t>・答えられない質問を検知したら、以下を実行:</a:t>
             </a:r>
             <a:endParaRPr lang="en-US" sz="1400" dirty="0"/>
           </a:p>
@@ -2196,7 +2296,7 @@
                 <a:ea typeface="Yu Gothic UI" pitchFamily="34" charset="-122"/>
                 <a:cs typeface="Yu Gothic UI" pitchFamily="34" charset="-120"/>
               </a:rPr>
-              <a:t>・[HANDOFF] を検知したら「担当者に繋ぎます、後ほどご連絡します」を返信+相談員(●●●@example.com)にメール通知</a:t>
+              <a:t>  1) 顧客には「担当者から後ほどご連絡します」を返信</a:t>
             </a:r>
             <a:endParaRPr lang="en-US" sz="1400" dirty="0"/>
           </a:p>
@@ -2216,7 +2316,47 @@
                 <a:ea typeface="Yu Gothic UI" pitchFamily="34" charset="-122"/>
                 <a:cs typeface="Yu Gothic UI" pitchFamily="34" charset="-120"/>
               </a:rPr>
-              <a:t>・メール本文に会話履歴+LINEユーザーIDを含める</a:t>
+              <a:t>  2) 社内担当者(●●●@example.com)にメール送信</a:t>
+            </a:r>
+            <a:endParaRPr lang="en-US" sz="1400" dirty="0"/>
+          </a:p>
+          <a:p>
+            <a:pPr indent="0" marL="0">
+              <a:spcAft>
+                <a:spcPts val="400"/>
+              </a:spcAft>
+              <a:buNone/>
+            </a:pPr>
+            <a:r>
+              <a:rPr lang="en-US" sz="1400" dirty="0">
+                <a:solidFill>
+                  <a:srgbClr val="1A1A1A"/>
+                </a:solidFill>
+                <a:latin typeface="Yu Gothic UI" pitchFamily="34" charset="0"/>
+                <a:ea typeface="Yu Gothic UI" pitchFamily="34" charset="-122"/>
+                <a:cs typeface="Yu Gothic UI" pitchFamily="34" charset="-120"/>
+              </a:rPr>
+              <a:t>  3) メール本文には「質問内容 / 時刻 / LINEユーザーID(取得できれば)」を含める</a:t>
+            </a:r>
+            <a:endParaRPr lang="en-US" sz="1400" dirty="0"/>
+          </a:p>
+          <a:p>
+            <a:pPr indent="0" marL="0">
+              <a:spcAft>
+                <a:spcPts val="400"/>
+              </a:spcAft>
+              <a:buNone/>
+            </a:pPr>
+            <a:r>
+              <a:rPr lang="en-US" sz="1400" dirty="0">
+                <a:solidFill>
+                  <a:srgbClr val="1A1A1A"/>
+                </a:solidFill>
+                <a:latin typeface="Yu Gothic UI" pitchFamily="34" charset="0"/>
+                <a:ea typeface="Yu Gothic UI" pitchFamily="34" charset="-122"/>
+                <a:cs typeface="Yu Gothic UI" pitchFamily="34" charset="-120"/>
+              </a:rPr>
+              <a:t>・完成したデプロイ URL を、公式LINE のリッチメニュー1枠に URL アクションで設定する手順も教えて</a:t>
             </a:r>
             <a:endParaRPr lang="en-US" sz="1400" dirty="0"/>
           </a:p>
@@ -2344,7 +2484,7 @@
                 <a:ea typeface="Yu Gothic UI" pitchFamily="34" charset="-122"/>
                 <a:cs typeface="Yu Gothic UI" pitchFamily="34" charset="-120"/>
               </a:rPr>
-              <a:t>・FAQ知識付き GAS</a:t>
+              <a:t>・デプロイ済み Web アプリ URL(公開状態)</a:t>
             </a:r>
             <a:endParaRPr lang="en-US" sz="1400" dirty="0"/>
           </a:p>
@@ -2364,7 +2504,7 @@
                 <a:ea typeface="Yu Gothic UI" pitchFamily="34" charset="-122"/>
                 <a:cs typeface="Yu Gothic UI" pitchFamily="34" charset="-120"/>
               </a:rPr>
-              <a:t>・[HANDOFF] 検知 → 相談員メール通知</a:t>
+              <a:t>・担当者通知メールが実際に届くこと確認</a:t>
             </a:r>
             <a:endParaRPr lang="en-US" sz="1400" dirty="0"/>
           </a:p>
@@ -2384,7 +2524,7 @@
                 <a:ea typeface="Yu Gothic UI" pitchFamily="34" charset="-122"/>
                 <a:cs typeface="Yu Gothic UI" pitchFamily="34" charset="-120"/>
               </a:rPr>
-              <a:t>・3パターン(既知/未知/不適切)テストで挙動確認</a:t>
+              <a:t>・リッチメニューから URL 遷移→チャット動作 が一気通貫で確認済み</a:t>
             </a:r>
             <a:endParaRPr lang="en-US" sz="1400" dirty="0"/>
           </a:p>
@@ -2512,7 +2652,7 @@
                 <a:ea typeface="Yu Gothic UI" pitchFamily="34" charset="-122"/>
                 <a:cs typeface="Yu Gothic UI" pitchFamily="34" charset="-120"/>
               </a:rPr>
-              <a:t>・FAQ が古いままだと精度が下がる。「四半期に1回更新」の運用を必ず伝える。</a:t>
+              <a:t>・デプロイ時「アクセス権 = 全員」でない生徒が多い。ここで詰まると本番動かない。</a:t>
             </a:r>
             <a:endParaRPr lang="en-US" sz="1400" dirty="0"/>
           </a:p>
@@ -2532,7 +2672,7 @@
                 <a:ea typeface="Yu Gothic UI" pitchFamily="34" charset="-122"/>
                 <a:cs typeface="Yu Gothic UI" pitchFamily="34" charset="-120"/>
               </a:rPr>
-              <a:t>・[HANDOFF] を「AI が判断する」ことに慣れさせる。明示的なマーカーで扱いやすくなる。</a:t>
+              <a:t>・通知メールが件名も本文も曖昧になりがち。「[LINE相談] 質問: xxx」など件名テンプレを共有。</a:t>
             </a:r>
             <a:endParaRPr lang="en-US" sz="1400" dirty="0"/>
           </a:p>
@@ -2552,7 +2692,7 @@
                 <a:ea typeface="Yu Gothic UI" pitchFamily="34" charset="-122"/>
                 <a:cs typeface="Yu Gothic UI" pitchFamily="34" charset="-120"/>
               </a:rPr>
-              <a:t>・相談員メールが埋もれないよう件名を [LINE相談] で始めるなどのルール化。</a:t>
+              <a:t>・顧客への案内文を忘れると「AI 沈黙」の事故に。応答を必ず返す設計を徹底。</a:t>
             </a:r>
             <a:endParaRPr lang="en-US" sz="1400" dirty="0"/>
           </a:p>
@@ -2572,7 +2712,7 @@
                 <a:ea typeface="Yu Gothic UI" pitchFamily="34" charset="-122"/>
                 <a:cs typeface="Yu Gothic UI" pitchFamily="34" charset="-120"/>
               </a:rPr>
-              <a:t>・「不適切質問(炎上リスク)」のテストを必ず1件入れる。AIが暴走しないか確認。</a:t>
+              <a:t>・実機テストで「リッチメニュー→URL→チャット→通知」の一連が動くかを最後に見せる。</a:t>
             </a:r>
             <a:endParaRPr lang="en-US" sz="1400" dirty="0"/>
           </a:p>
